--- a/docs/energypedia/brand/canva/Energypedia_Canva_kwadrat_1080x1080.pptx
+++ b/docs/energypedia/brand/canva/Energypedia_Canva_kwadrat_1080x1080.pptx
@@ -1244,7 +1244,7 @@
                 <a:ea typeface="Space Grotesk" pitchFamily="34" charset="-122"/>
                 <a:cs typeface="Space Grotesk" pitchFamily="34" charset="-120"/>
               </a:rPr>
-              <a:t>[Teza z wydarzenia — do 60 znaków]</a:t>
+              <a:t>[Teza z wydarzenia – do 60 znaków]</a:t>
             </a:r>
             <a:endParaRPr lang="en-US" sz="3450" dirty="0"/>
           </a:p>
